--- a/docs/组会汇报_20260916/组会汇报_纯视觉芍药行间除草机器人_20260916.pptx
+++ b/docs/组会汇报_20260916/组会汇报_纯视觉芍药行间除草机器人_20260916.pptx
@@ -22,7 +22,6 @@
     <p:sldId id="270" r:id="rId21"/>
     <p:sldId id="271" r:id="rId22"/>
     <p:sldId id="272" r:id="rId23"/>
-    <p:sldId id="273" r:id="rId24"/>
   </p:sldIdLst>
   <p:sldSz cx="12191695" cy="6858000" type="screen4x3"/>
   <p:notesSz cx="6858000" cy="9144000"/>
@@ -3283,7 +3282,7 @@
                 </a:solidFill>
                 <a:latin typeface="Microsoft YaHei"/>
               </a:rPr>
-              <a:t>汇报人：dangan</a:t>
+              <a:t>汇报人：杨顶浩</a:t>
             </a:r>
           </a:p>
         </p:txBody>
@@ -3779,7 +3778,7 @@
                 </a:solidFill>
                 <a:latin typeface="Microsoft YaHei"/>
               </a:rPr>
-              <a:t>进度与下一步</a:t>
+              <a:t>小结与讨论</a:t>
             </a:r>
           </a:p>
         </p:txBody>
@@ -3966,44 +3965,7 @@
               </a:rPr>
               <a:t>1. 大片裸土分对，不保证近作物那几十像素边界准
 2. 对刀具而言，少量边界像素错就可能造成明显偏移
-3. 三层评价：分割指标 / 导航线误差与失效 / 田间效果
-4. 真值必须独立标注，不能拿算法自己的输出当真值
-5. 实际输出与失效样例：现场演示，未放入本 PPT</a:t>
-            </a:r>
-          </a:p>
-        </p:txBody>
-      </p:sp>
-      <p:sp>
-        <p:nvSpPr>
-          <p:cNvPr id="17" name="AGENT_TAKEAWAY"/>
-          <p:cNvSpPr txBox="1"/>
-          <p:nvPr/>
-        </p:nvSpPr>
-        <p:spPr>
-          <a:xfrm>
-            <a:off x="868680" y="5989320"/>
-            <a:ext cx="10195560" cy="274320"/>
-          </a:xfrm>
-          <a:prstGeom prst="rect">
-            <a:avLst/>
-          </a:prstGeom>
-          <a:noFill/>
-        </p:spPr>
-        <p:txBody>
-          <a:bodyPr wrap="square" lIns="0" rIns="0" tIns="0" bIns="0" anchor="ctr">
-            <a:spAutoFit/>
-          </a:bodyPr>
-          <a:lstStyle/>
-          <a:p>
-            <a:pPr algn="l"/>
-            <a:r>
-              <a:rPr sz="1600" b="1" ea="Microsoft YaHei">
-                <a:solidFill>
-                  <a:srgbClr val="8B0D18"/>
-                </a:solidFill>
-                <a:latin typeface="Microsoft YaHei"/>
-              </a:rPr>
-              <a:t>目前只有第一层有数，后两层的真值还没标</a:t>
+3. 三层评价：分割指标 / 导航线误差与失效 / 田间效果</a:t>
             </a:r>
           </a:p>
         </p:txBody>
@@ -4421,7 +4383,7 @@
                 </a:solidFill>
                 <a:latin typeface="Microsoft YaHei"/>
               </a:rPr>
-              <a:t>进度与下一步</a:t>
+              <a:t>小结与讨论</a:t>
             </a:r>
           </a:p>
         </p:txBody>
@@ -5092,43 +5054,7 @@
                 <a:latin typeface="Microsoft YaHei"/>
               </a:rPr>
               <a:t>1. 作物行中心 / 通道中心 / 作业带中心，三者可能不重合
-2. 不重合的原因：农艺保护带、叶片伸展、刀具宽度
-3. 现状：IPM 梯形与尺度仍为硬编码，低机位标定未做</a:t>
-            </a:r>
-          </a:p>
-        </p:txBody>
-      </p:sp>
-      <p:sp>
-        <p:nvSpPr>
-          <p:cNvPr id="30" name="AGENT_TAKEAWAY"/>
-          <p:cNvSpPr txBox="1"/>
-          <p:nvPr/>
-        </p:nvSpPr>
-        <p:spPr>
-          <a:xfrm>
-            <a:off x="868680" y="5989320"/>
-            <a:ext cx="10195560" cy="274320"/>
-          </a:xfrm>
-          <a:prstGeom prst="rect">
-            <a:avLst/>
-          </a:prstGeom>
-          <a:noFill/>
-        </p:spPr>
-        <p:txBody>
-          <a:bodyPr wrap="square" lIns="0" rIns="0" tIns="0" bIns="0" anchor="ctr">
-            <a:spAutoFit/>
-          </a:bodyPr>
-          <a:lstStyle/>
-          <a:p>
-            <a:pPr algn="l"/>
-            <a:r>
-              <a:rPr sz="1600" b="1" ea="Microsoft YaHei">
-                <a:solidFill>
-                  <a:srgbClr val="8B0D18"/>
-                </a:solidFill>
-                <a:latin typeface="Microsoft YaHei"/>
-              </a:rPr>
-              <a:t>第三条线才是刀具要走的那条，须在论文里定义清楚</a:t>
+2. 不重合的原因：农艺保护带、叶片伸展、刀具宽度</a:t>
             </a:r>
           </a:p>
         </p:txBody>
@@ -5546,7 +5472,7 @@
                 </a:solidFill>
                 <a:latin typeface="Microsoft YaHei"/>
               </a:rPr>
-              <a:t>进度与下一步</a:t>
+              <a:t>小结与讨论</a:t>
             </a:r>
           </a:p>
         </p:txBody>
@@ -6188,7 +6114,7 @@
                 </a:solidFill>
                 <a:latin typeface="Microsoft YaHei"/>
               </a:rPr>
-              <a:t>进度与下一步</a:t>
+              <a:t>小结与讨论</a:t>
             </a:r>
           </a:p>
         </p:txBody>
@@ -6293,7 +6219,7 @@
                 </a:solidFill>
                 <a:latin typeface="Microsoft YaHei"/>
               </a:rPr>
-              <a:t>中间刀控制的关键不在参数，在误差定义</a:t>
+              <a:t>中间刀还不能叫闭环：刀到位了，相机看不出来</a:t>
             </a:r>
           </a:p>
         </p:txBody>
@@ -6373,11 +6299,11 @@
                 </a:solidFill>
                 <a:latin typeface="Microsoft YaHei"/>
               </a:rPr>
-              <a:t>1. 相机固连车体，滑台横移并不改变图像里的偏差量
-2. 真闭环误差应为：目标刀位 − 刀位实测 q
-3. 现状：主入口把图像偏差直接送进位置式 PID
-4. 纯函数复现：保持 20 mm 偏差，34 s 累积至 50 mm 限幅
-5. 应分开描述：视觉外环 / 位置前馈 / 伺服内环</a:t>
+              <a:t>1. 相机装在车架上，量的是“行相对车”的偏移
+2. 刀在滑台上移过去了，图像里那个偏移量并不会变小
+3. 现在代码把这个不会变的量当误差，输出一直加到 50 mm 限幅
+4. 真误差 = 目标刀位（图像给）− 刀位实测 q（现在没有）
+5. 所以先补刀位测量，再谈主动对刀闭环</a:t>
             </a:r>
           </a:p>
         </p:txBody>
@@ -6412,7 +6338,7 @@
                 </a:solidFill>
                 <a:latin typeface="Microsoft YaHei"/>
               </a:rPr>
-              <a:t>误差来源讲清之前，不提主动对刀闭环已完成</a:t>
+              <a:t>那组限幅数字是纯函数复现，只说明机制，不代表整车会失稳</a:t>
             </a:r>
           </a:p>
         </p:txBody>
@@ -6830,7 +6756,7 @@
                 </a:solidFill>
                 <a:latin typeface="Microsoft YaHei"/>
               </a:rPr>
-              <a:t>进度与下一步</a:t>
+              <a:t>小结与讨论</a:t>
             </a:r>
           </a:p>
         </p:txBody>
@@ -7953,7 +7879,7 @@
                 </a:solidFill>
                 <a:latin typeface="Microsoft YaHei"/>
               </a:rPr>
-              <a:t>进度与下一步</a:t>
+              <a:t>小结与讨论</a:t>
             </a:r>
           </a:p>
         </p:txBody>
@@ -8058,7 +7984,7 @@
                 </a:solidFill>
                 <a:latin typeface="Microsoft YaHei"/>
               </a:rPr>
-              <a:t>开放问题：进土深度目前没有可用反馈</a:t>
+              <a:t>开放问题：刀上发生了什么，机器不知道</a:t>
             </a:r>
           </a:p>
         </p:txBody>
@@ -8138,11 +8064,11 @@
                 </a:solidFill>
                 <a:latin typeface="Microsoft YaHei"/>
               </a:rPr>
-              <a:t>1. 电推杆只有供电与方向控制，无任何位置反馈通路登记
-2. 协议 TOOL 帧只含横向偏移与升降位，没有深度字段
-3. 板上三个限位是滑台防撞，不参与定深
-4. 现有硬件下唯一可用量是时间：10 mm/s、全程 20 s
-5. 后果：入土深度不能闭环，也给不出实测值</a:t>
+              <a:t>1. 挂草缠绕与撞石头都要求立刻抬刀，现在两条都做不到
+2. 电推杆只有通电正反转，无位置与负载反馈；协议里也没有深度字段
+3. 撞石是瞬时冲击：10 mm/s 抬 50 mm 要 5 秒，靠推杆根本来不及
+4. 挂草是缓变负载：可试用电流判据，但采样通道是否覆盖推杆待跟线
+5. 后果：轻则漏草，重则刀体变形、推杆烧毁、伤芍药根系</a:t>
             </a:r>
           </a:p>
         </p:txBody>
@@ -8177,7 +8103,7 @@
                 </a:solidFill>
                 <a:latin typeface="Microsoft YaHei"/>
               </a:rPr>
-              <a:t>这直接影响春季能否解释除草率与伤苗率</a:t>
+              <a:t>这不是定深精度问题，是过载保护缺失问题</a:t>
             </a:r>
           </a:p>
         </p:txBody>
@@ -8595,7 +8521,7 @@
                 </a:solidFill>
                 <a:latin typeface="Microsoft YaHei"/>
               </a:rPr>
-              <a:t>进度与下一步</a:t>
+              <a:t>小结与讨论</a:t>
             </a:r>
           </a:p>
         </p:txBody>
@@ -8700,7 +8626,7 @@
                 </a:solidFill>
                 <a:latin typeface="Microsoft YaHei"/>
               </a:rPr>
-              <a:t>三条候选解法，倾向先用限深轮机械定深</a:t>
+              <a:t>分两层解：先机械保机，再电流辨草</a:t>
             </a:r>
           </a:p>
         </p:txBody>
@@ -8778,7 +8704,7 @@
                 </a:solidFill>
                 <a:latin typeface="Microsoft YaHei"/>
               </a:rPr>
-              <a:t>① 外置行程测量</a:t>
+              <a:t>撞石</a:t>
             </a:r>
           </a:p>
         </p:txBody>
@@ -8813,7 +8739,7 @@
                 </a:solidFill>
                 <a:latin typeface="Microsoft YaHei"/>
               </a:rPr>
-              <a:t>拉线位移计／电位计／标尺读数，改动最大</a:t>
+              <a:t>瞬时过载靠机械卸载：剪切销或弹簧避障，遇阻刀自退</a:t>
             </a:r>
           </a:p>
         </p:txBody>
@@ -8891,7 +8817,7 @@
                 </a:solidFill>
                 <a:latin typeface="Microsoft YaHei"/>
               </a:rPr>
-              <a:t>② 时间推算</a:t>
+              <a:t>挂草</a:t>
             </a:r>
           </a:p>
         </p:txBody>
@@ -8926,7 +8852,7 @@
                 </a:solidFill>
                 <a:latin typeface="Microsoft YaHei"/>
               </a:rPr>
-              <a:t>t×10 mm/s，须先实测重复定位能否达 ±5 mm</a:t>
+              <a:t>缓变负载靠电机电流趋势检测，阈值须台架标定</a:t>
             </a:r>
           </a:p>
         </p:txBody>
@@ -9004,7 +8930,7 @@
                 </a:solidFill>
                 <a:latin typeface="Microsoft YaHei"/>
               </a:rPr>
-              <a:t>③ 限深轮定深</a:t>
+              <a:t>抬刀速度</a:t>
             </a:r>
           </a:p>
         </p:txBody>
@@ -9039,7 +8965,7 @@
                 </a:solidFill>
                 <a:latin typeface="Microsoft YaHei"/>
               </a:rPr>
-              <a:t>机械保证深度，推杆只管升降；改动最小可先上田（默认）</a:t>
+              <a:t>现有 10 mm/s 不够，需评估大导程或弹簧快抬</a:t>
             </a:r>
           </a:p>
         </p:txBody>
@@ -9117,7 +9043,7 @@
                 </a:solidFill>
                 <a:latin typeface="Microsoft YaHei"/>
               </a:rPr>
-              <a:t>判定依据</a:t>
+              <a:t>前置条件</a:t>
             </a:r>
           </a:p>
         </p:txBody>
@@ -9152,7 +9078,7 @@
                 </a:solidFill>
                 <a:latin typeface="Microsoft YaHei"/>
               </a:rPr>
-              <a:t>决策 D6：台架达不到 ±5 mm 再加深度反馈</a:t>
+              <a:t>刀梁接入方式与推杆电流采样通道待实物确认</a:t>
             </a:r>
           </a:p>
         </p:txBody>
@@ -9187,7 +9113,7 @@
                 </a:solidFill>
                 <a:latin typeface="Microsoft YaHei"/>
               </a:rPr>
-              <a:t>请组会给意见：走③作默认，还是必须一步到位上①</a:t>
+              <a:t>请组会定：机械卸载先上，电流辨草作为下一步研究内容</a:t>
             </a:r>
           </a:p>
         </p:txBody>
@@ -9212,1129 +9138,6 @@
       <p:grpSpPr/>
       <p:sp>
         <p:nvSpPr>
-          <p:cNvPr id="2" name="AGENT_NAV_SLOT_0"/>
-          <p:cNvSpPr/>
-          <p:nvPr/>
-        </p:nvSpPr>
-        <p:spPr>
-          <a:xfrm>
-            <a:off x="146304" y="27432"/>
-            <a:ext cx="2379268" cy="347472"/>
-          </a:xfrm>
-          <a:prstGeom prst="rect">
-            <a:avLst/>
-          </a:prstGeom>
-          <a:solidFill>
-            <a:srgbClr val="FFFFFF"/>
-          </a:solidFill>
-          <a:ln w="10160">
-            <a:solidFill>
-              <a:srgbClr val="BEBEBE"/>
-            </a:solidFill>
-          </a:ln>
-        </p:spPr>
-        <p:style>
-          <a:lnRef idx="1">
-            <a:schemeClr val="accent1"/>
-          </a:lnRef>
-          <a:fillRef idx="3">
-            <a:schemeClr val="accent1"/>
-          </a:fillRef>
-          <a:effectRef idx="2">
-            <a:schemeClr val="accent1"/>
-          </a:effectRef>
-          <a:fontRef idx="minor">
-            <a:schemeClr val="lt1"/>
-          </a:fontRef>
-        </p:style>
-        <p:txBody>
-          <a:bodyPr rtlCol="0" anchor="ctr"/>
-          <a:lstStyle/>
-          <a:p>
-            <a:pPr algn="ctr"/>
-          </a:p>
-        </p:txBody>
-      </p:sp>
-      <p:sp>
-        <p:nvSpPr>
-          <p:cNvPr id="3" name="AGENT_NAV_LABEL_0"/>
-          <p:cNvSpPr txBox="1"/>
-          <p:nvPr/>
-        </p:nvSpPr>
-        <p:spPr>
-          <a:xfrm>
-            <a:off x="146304" y="59436"/>
-            <a:ext cx="2379268" cy="228600"/>
-          </a:xfrm>
-          <a:prstGeom prst="rect">
-            <a:avLst/>
-          </a:prstGeom>
-          <a:noFill/>
-        </p:spPr>
-        <p:txBody>
-          <a:bodyPr wrap="none" lIns="0" rIns="0" tIns="0" bIns="0" anchor="ctr">
-            <a:spAutoFit/>
-          </a:bodyPr>
-          <a:lstStyle/>
-          <a:p>
-            <a:pPr algn="ctr"/>
-            <a:r>
-              <a:rPr sz="1200" b="0" ea="Microsoft YaHei">
-                <a:solidFill>
-                  <a:srgbClr val="1E1E1E"/>
-                </a:solidFill>
-                <a:latin typeface="Microsoft YaHei"/>
-              </a:rPr>
-              <a:t>立题与约束</a:t>
-            </a:r>
-          </a:p>
-        </p:txBody>
-      </p:sp>
-      <p:sp>
-        <p:nvSpPr>
-          <p:cNvPr id="4" name="AGENT_NAV_SLOT_1"/>
-          <p:cNvSpPr/>
-          <p:nvPr/>
-        </p:nvSpPr>
-        <p:spPr>
-          <a:xfrm>
-            <a:off x="2525572" y="27432"/>
-            <a:ext cx="2379268" cy="347472"/>
-          </a:xfrm>
-          <a:prstGeom prst="rect">
-            <a:avLst/>
-          </a:prstGeom>
-          <a:solidFill>
-            <a:srgbClr val="FFFFFF"/>
-          </a:solidFill>
-          <a:ln w="10160">
-            <a:solidFill>
-              <a:srgbClr val="BEBEBE"/>
-            </a:solidFill>
-          </a:ln>
-        </p:spPr>
-        <p:style>
-          <a:lnRef idx="1">
-            <a:schemeClr val="accent1"/>
-          </a:lnRef>
-          <a:fillRef idx="3">
-            <a:schemeClr val="accent1"/>
-          </a:fillRef>
-          <a:effectRef idx="2">
-            <a:schemeClr val="accent1"/>
-          </a:effectRef>
-          <a:fontRef idx="minor">
-            <a:schemeClr val="lt1"/>
-          </a:fontRef>
-        </p:style>
-        <p:txBody>
-          <a:bodyPr rtlCol="0" anchor="ctr"/>
-          <a:lstStyle/>
-          <a:p>
-            <a:pPr algn="ctr"/>
-          </a:p>
-        </p:txBody>
-      </p:sp>
-      <p:sp>
-        <p:nvSpPr>
-          <p:cNvPr id="5" name="AGENT_NAV_LABEL_1"/>
-          <p:cNvSpPr txBox="1"/>
-          <p:nvPr/>
-        </p:nvSpPr>
-        <p:spPr>
-          <a:xfrm>
-            <a:off x="2525572" y="59436"/>
-            <a:ext cx="2379268" cy="228600"/>
-          </a:xfrm>
-          <a:prstGeom prst="rect">
-            <a:avLst/>
-          </a:prstGeom>
-          <a:noFill/>
-        </p:spPr>
-        <p:txBody>
-          <a:bodyPr wrap="none" lIns="0" rIns="0" tIns="0" bIns="0" anchor="ctr">
-            <a:spAutoFit/>
-          </a:bodyPr>
-          <a:lstStyle/>
-          <a:p>
-            <a:pPr algn="ctr"/>
-            <a:r>
-              <a:rPr sz="1200" b="0" ea="Microsoft YaHei">
-                <a:solidFill>
-                  <a:srgbClr val="1E1E1E"/>
-                </a:solidFill>
-                <a:latin typeface="Microsoft YaHei"/>
-              </a:rPr>
-              <a:t>除草机构选型</a:t>
-            </a:r>
-          </a:p>
-        </p:txBody>
-      </p:sp>
-      <p:sp>
-        <p:nvSpPr>
-          <p:cNvPr id="6" name="AGENT_NAV_SLOT_2"/>
-          <p:cNvSpPr/>
-          <p:nvPr/>
-        </p:nvSpPr>
-        <p:spPr>
-          <a:xfrm>
-            <a:off x="4904841" y="27432"/>
-            <a:ext cx="2379268" cy="347472"/>
-          </a:xfrm>
-          <a:prstGeom prst="rect">
-            <a:avLst/>
-          </a:prstGeom>
-          <a:solidFill>
-            <a:srgbClr val="FFFFFF"/>
-          </a:solidFill>
-          <a:ln w="10160">
-            <a:solidFill>
-              <a:srgbClr val="BEBEBE"/>
-            </a:solidFill>
-          </a:ln>
-        </p:spPr>
-        <p:style>
-          <a:lnRef idx="1">
-            <a:schemeClr val="accent1"/>
-          </a:lnRef>
-          <a:fillRef idx="3">
-            <a:schemeClr val="accent1"/>
-          </a:fillRef>
-          <a:effectRef idx="2">
-            <a:schemeClr val="accent1"/>
-          </a:effectRef>
-          <a:fontRef idx="minor">
-            <a:schemeClr val="lt1"/>
-          </a:fontRef>
-        </p:style>
-        <p:txBody>
-          <a:bodyPr rtlCol="0" anchor="ctr"/>
-          <a:lstStyle/>
-          <a:p>
-            <a:pPr algn="ctr"/>
-          </a:p>
-        </p:txBody>
-      </p:sp>
-      <p:sp>
-        <p:nvSpPr>
-          <p:cNvPr id="7" name="AGENT_NAV_LABEL_2"/>
-          <p:cNvSpPr txBox="1"/>
-          <p:nvPr/>
-        </p:nvSpPr>
-        <p:spPr>
-          <a:xfrm>
-            <a:off x="4904841" y="59436"/>
-            <a:ext cx="2379268" cy="228600"/>
-          </a:xfrm>
-          <a:prstGeom prst="rect">
-            <a:avLst/>
-          </a:prstGeom>
-          <a:noFill/>
-        </p:spPr>
-        <p:txBody>
-          <a:bodyPr wrap="none" lIns="0" rIns="0" tIns="0" bIns="0" anchor="ctr">
-            <a:spAutoFit/>
-          </a:bodyPr>
-          <a:lstStyle/>
-          <a:p>
-            <a:pPr algn="ctr"/>
-            <a:r>
-              <a:rPr sz="1200" b="0" ea="Microsoft YaHei">
-                <a:solidFill>
-                  <a:srgbClr val="1E1E1E"/>
-                </a:solidFill>
-                <a:latin typeface="Microsoft YaHei"/>
-              </a:rPr>
-              <a:t>设计与控制原理</a:t>
-            </a:r>
-          </a:p>
-        </p:txBody>
-      </p:sp>
-      <p:sp>
-        <p:nvSpPr>
-          <p:cNvPr id="8" name="AGENT_NAV_SLOT_3"/>
-          <p:cNvSpPr/>
-          <p:nvPr/>
-        </p:nvSpPr>
-        <p:spPr>
-          <a:xfrm>
-            <a:off x="7284110" y="27432"/>
-            <a:ext cx="2379268" cy="347472"/>
-          </a:xfrm>
-          <a:prstGeom prst="rect">
-            <a:avLst/>
-          </a:prstGeom>
-          <a:solidFill>
-            <a:srgbClr val="FFFFFF"/>
-          </a:solidFill>
-          <a:ln w="10160">
-            <a:solidFill>
-              <a:srgbClr val="BEBEBE"/>
-            </a:solidFill>
-          </a:ln>
-        </p:spPr>
-        <p:style>
-          <a:lnRef idx="1">
-            <a:schemeClr val="accent1"/>
-          </a:lnRef>
-          <a:fillRef idx="3">
-            <a:schemeClr val="accent1"/>
-          </a:fillRef>
-          <a:effectRef idx="2">
-            <a:schemeClr val="accent1"/>
-          </a:effectRef>
-          <a:fontRef idx="minor">
-            <a:schemeClr val="lt1"/>
-          </a:fontRef>
-        </p:style>
-        <p:txBody>
-          <a:bodyPr rtlCol="0" anchor="ctr"/>
-          <a:lstStyle/>
-          <a:p>
-            <a:pPr algn="ctr"/>
-          </a:p>
-        </p:txBody>
-      </p:sp>
-      <p:sp>
-        <p:nvSpPr>
-          <p:cNvPr id="9" name="AGENT_NAV_LABEL_3"/>
-          <p:cNvSpPr txBox="1"/>
-          <p:nvPr/>
-        </p:nvSpPr>
-        <p:spPr>
-          <a:xfrm>
-            <a:off x="7284110" y="59436"/>
-            <a:ext cx="2379268" cy="228600"/>
-          </a:xfrm>
-          <a:prstGeom prst="rect">
-            <a:avLst/>
-          </a:prstGeom>
-          <a:noFill/>
-        </p:spPr>
-        <p:txBody>
-          <a:bodyPr wrap="none" lIns="0" rIns="0" tIns="0" bIns="0" anchor="ctr">
-            <a:spAutoFit/>
-          </a:bodyPr>
-          <a:lstStyle/>
-          <a:p>
-            <a:pPr algn="ctr"/>
-            <a:r>
-              <a:rPr sz="1200" b="0" ea="Microsoft YaHei">
-                <a:solidFill>
-                  <a:srgbClr val="1E1E1E"/>
-                </a:solidFill>
-                <a:latin typeface="Microsoft YaHei"/>
-              </a:rPr>
-              <a:t>进土深度问题</a:t>
-            </a:r>
-          </a:p>
-        </p:txBody>
-      </p:sp>
-      <p:sp>
-        <p:nvSpPr>
-          <p:cNvPr id="10" name="AGENT_NAV_SLOT_4"/>
-          <p:cNvSpPr/>
-          <p:nvPr/>
-        </p:nvSpPr>
-        <p:spPr>
-          <a:xfrm>
-            <a:off x="9663379" y="27432"/>
-            <a:ext cx="2379268" cy="347472"/>
-          </a:xfrm>
-          <a:prstGeom prst="rect">
-            <a:avLst/>
-          </a:prstGeom>
-          <a:solidFill>
-            <a:srgbClr val="8B0D18"/>
-          </a:solidFill>
-          <a:ln w="10160">
-            <a:solidFill>
-              <a:srgbClr val="BEBEBE"/>
-            </a:solidFill>
-          </a:ln>
-        </p:spPr>
-        <p:style>
-          <a:lnRef idx="1">
-            <a:schemeClr val="accent1"/>
-          </a:lnRef>
-          <a:fillRef idx="3">
-            <a:schemeClr val="accent1"/>
-          </a:fillRef>
-          <a:effectRef idx="2">
-            <a:schemeClr val="accent1"/>
-          </a:effectRef>
-          <a:fontRef idx="minor">
-            <a:schemeClr val="lt1"/>
-          </a:fontRef>
-        </p:style>
-        <p:txBody>
-          <a:bodyPr rtlCol="0" anchor="ctr"/>
-          <a:lstStyle/>
-          <a:p>
-            <a:pPr algn="ctr"/>
-          </a:p>
-        </p:txBody>
-      </p:sp>
-      <p:sp>
-        <p:nvSpPr>
-          <p:cNvPr id="11" name="AGENT_NAV_LABEL_4"/>
-          <p:cNvSpPr txBox="1"/>
-          <p:nvPr/>
-        </p:nvSpPr>
-        <p:spPr>
-          <a:xfrm>
-            <a:off x="9663379" y="59436"/>
-            <a:ext cx="2379268" cy="228600"/>
-          </a:xfrm>
-          <a:prstGeom prst="rect">
-            <a:avLst/>
-          </a:prstGeom>
-          <a:noFill/>
-        </p:spPr>
-        <p:txBody>
-          <a:bodyPr wrap="none" lIns="0" rIns="0" tIns="0" bIns="0" anchor="ctr">
-            <a:spAutoFit/>
-          </a:bodyPr>
-          <a:lstStyle/>
-          <a:p>
-            <a:pPr algn="ctr"/>
-            <a:r>
-              <a:rPr sz="1200" b="1" ea="Microsoft YaHei">
-                <a:solidFill>
-                  <a:srgbClr val="FFFFFF"/>
-                </a:solidFill>
-                <a:latin typeface="Microsoft YaHei"/>
-              </a:rPr>
-              <a:t>进度与下一步</a:t>
-            </a:r>
-          </a:p>
-        </p:txBody>
-      </p:sp>
-      <p:sp>
-        <p:nvSpPr>
-          <p:cNvPr id="12" name="AGENT_FOOTER"/>
-          <p:cNvSpPr txBox="1"/>
-          <p:nvPr/>
-        </p:nvSpPr>
-        <p:spPr>
-          <a:xfrm>
-            <a:off x="320040" y="6510528"/>
-            <a:ext cx="8595360" cy="128016"/>
-          </a:xfrm>
-          <a:prstGeom prst="rect">
-            <a:avLst/>
-          </a:prstGeom>
-          <a:noFill/>
-        </p:spPr>
-        <p:txBody>
-          <a:bodyPr wrap="none" lIns="0" rIns="0" tIns="0" bIns="0" anchor="ctr">
-            <a:spAutoFit/>
-          </a:bodyPr>
-          <a:lstStyle/>
-          <a:p>
-            <a:pPr algn="l"/>
-            <a:r>
-              <a:rPr sz="800" b="0" ea="Microsoft YaHei">
-                <a:solidFill>
-                  <a:srgbClr val="696969"/>
-                </a:solidFill>
-                <a:latin typeface="Microsoft YaHei"/>
-              </a:rPr>
-              <a:t>纯视觉芍药行间除草机器人 · 组会汇报 · 2026-09-16</a:t>
-            </a:r>
-          </a:p>
-        </p:txBody>
-      </p:sp>
-      <p:sp>
-        <p:nvSpPr>
-          <p:cNvPr id="13" name="AGENT_PAGE_NUMBER"/>
-          <p:cNvSpPr txBox="1"/>
-          <p:nvPr/>
-        </p:nvSpPr>
-        <p:spPr>
-          <a:xfrm>
-            <a:off x="11521440" y="6501384"/>
-            <a:ext cx="256032" cy="128016"/>
-          </a:xfrm>
-          <a:prstGeom prst="rect">
-            <a:avLst/>
-          </a:prstGeom>
-          <a:noFill/>
-        </p:spPr>
-        <p:txBody>
-          <a:bodyPr wrap="none" lIns="0" rIns="0" tIns="0" bIns="0" anchor="ctr">
-            <a:spAutoFit/>
-          </a:bodyPr>
-          <a:lstStyle/>
-          <a:p>
-            <a:pPr algn="r"/>
-            <a:r>
-              <a:rPr sz="800" b="0" ea="Microsoft YaHei">
-                <a:solidFill>
-                  <a:srgbClr val="696969"/>
-                </a:solidFill>
-                <a:latin typeface="Microsoft YaHei"/>
-              </a:rPr>
-              <a:t>17</a:t>
-            </a:r>
-          </a:p>
-        </p:txBody>
-      </p:sp>
-      <p:sp>
-        <p:nvSpPr>
-          <p:cNvPr id="14" name="AGENT_TITLE"/>
-          <p:cNvSpPr txBox="1"/>
-          <p:nvPr/>
-        </p:nvSpPr>
-        <p:spPr>
-          <a:xfrm>
-            <a:off x="320040" y="539496"/>
-            <a:ext cx="11292840" cy="493776"/>
-          </a:xfrm>
-          <a:prstGeom prst="rect">
-            <a:avLst/>
-          </a:prstGeom>
-          <a:noFill/>
-        </p:spPr>
-        <p:txBody>
-          <a:bodyPr wrap="square" lIns="0" rIns="0" tIns="0" bIns="0" anchor="ctr">
-            <a:spAutoFit/>
-          </a:bodyPr>
-          <a:lstStyle/>
-          <a:p>
-            <a:pPr algn="l"/>
-            <a:r>
-              <a:rPr sz="3000" b="0" ea="Microsoft YaHei">
-                <a:solidFill>
-                  <a:srgbClr val="8B0D18"/>
-                </a:solidFill>
-                <a:latin typeface="Microsoft YaHei"/>
-              </a:rPr>
-              <a:t>进度按验证门讲，不按完成度百分比讲</a:t>
-            </a:r>
-          </a:p>
-        </p:txBody>
-      </p:sp>
-      <p:sp>
-        <p:nvSpPr>
-          <p:cNvPr id="15" name="AGENT_SUMMARY_LINE_0"/>
-          <p:cNvSpPr/>
-          <p:nvPr/>
-        </p:nvSpPr>
-        <p:spPr>
-          <a:xfrm>
-            <a:off x="868680" y="1417320"/>
-            <a:ext cx="10378440" cy="10972"/>
-          </a:xfrm>
-          <a:prstGeom prst="rect">
-            <a:avLst/>
-          </a:prstGeom>
-          <a:solidFill>
-            <a:srgbClr val="8B0D18"/>
-          </a:solidFill>
-          <a:ln>
-            <a:noFill/>
-          </a:ln>
-        </p:spPr>
-        <p:style>
-          <a:lnRef idx="1">
-            <a:schemeClr val="accent1"/>
-          </a:lnRef>
-          <a:fillRef idx="3">
-            <a:schemeClr val="accent1"/>
-          </a:fillRef>
-          <a:effectRef idx="2">
-            <a:schemeClr val="accent1"/>
-          </a:effectRef>
-          <a:fontRef idx="minor">
-            <a:schemeClr val="lt1"/>
-          </a:fontRef>
-        </p:style>
-        <p:txBody>
-          <a:bodyPr rtlCol="0" anchor="ctr"/>
-          <a:lstStyle/>
-          <a:p>
-            <a:pPr algn="ctr"/>
-          </a:p>
-        </p:txBody>
-      </p:sp>
-      <p:sp>
-        <p:nvSpPr>
-          <p:cNvPr id="16" name="AGENT_SUMMARY_LABEL_0"/>
-          <p:cNvSpPr txBox="1"/>
-          <p:nvPr/>
-        </p:nvSpPr>
-        <p:spPr>
-          <a:xfrm>
-            <a:off x="960120" y="1527048"/>
-            <a:ext cx="1828800" cy="685800"/>
-          </a:xfrm>
-          <a:prstGeom prst="rect">
-            <a:avLst/>
-          </a:prstGeom>
-          <a:noFill/>
-        </p:spPr>
-        <p:txBody>
-          <a:bodyPr wrap="square" lIns="0" rIns="0" tIns="0" bIns="0" anchor="ctr">
-            <a:spAutoFit/>
-          </a:bodyPr>
-          <a:lstStyle/>
-          <a:p>
-            <a:pPr algn="l"/>
-            <a:r>
-              <a:rPr sz="1900" b="1" ea="Microsoft YaHei">
-                <a:solidFill>
-                  <a:srgbClr val="8B0D18"/>
-                </a:solidFill>
-                <a:latin typeface="Microsoft YaHei"/>
-              </a:rPr>
-              <a:t>已完成</a:t>
-            </a:r>
-          </a:p>
-        </p:txBody>
-      </p:sp>
-      <p:sp>
-        <p:nvSpPr>
-          <p:cNvPr id="17" name="AGENT_SUMMARY_VALUE_0"/>
-          <p:cNvSpPr txBox="1"/>
-          <p:nvPr/>
-        </p:nvSpPr>
-        <p:spPr>
-          <a:xfrm>
-            <a:off x="2926080" y="1527048"/>
-            <a:ext cx="7909560" cy="685800"/>
-          </a:xfrm>
-          <a:prstGeom prst="rect">
-            <a:avLst/>
-          </a:prstGeom>
-          <a:noFill/>
-        </p:spPr>
-        <p:txBody>
-          <a:bodyPr wrap="square" lIns="0" rIns="0" tIns="0" bIns="0" anchor="ctr">
-            <a:spAutoFit/>
-          </a:bodyPr>
-          <a:lstStyle/>
-          <a:p>
-            <a:pPr algn="l"/>
-            <a:r>
-              <a:rPr sz="1800" b="0" ea="Microsoft YaHei">
-                <a:solidFill>
-                  <a:srgbClr val="1E1E1E"/>
-                </a:solidFill>
-                <a:latin typeface="Microsoft YaHei"/>
-              </a:rPr>
-              <a:t>设计定义、代码实现、固件可复现编译 0 错误</a:t>
-            </a:r>
-          </a:p>
-        </p:txBody>
-      </p:sp>
-      <p:sp>
-        <p:nvSpPr>
-          <p:cNvPr id="18" name="AGENT_SUMMARY_LINE_1"/>
-          <p:cNvSpPr/>
-          <p:nvPr/>
-        </p:nvSpPr>
-        <p:spPr>
-          <a:xfrm>
-            <a:off x="868680" y="2267712"/>
-            <a:ext cx="10378440" cy="10972"/>
-          </a:xfrm>
-          <a:prstGeom prst="rect">
-            <a:avLst/>
-          </a:prstGeom>
-          <a:solidFill>
-            <a:srgbClr val="8B0D18"/>
-          </a:solidFill>
-          <a:ln>
-            <a:noFill/>
-          </a:ln>
-        </p:spPr>
-        <p:style>
-          <a:lnRef idx="1">
-            <a:schemeClr val="accent1"/>
-          </a:lnRef>
-          <a:fillRef idx="3">
-            <a:schemeClr val="accent1"/>
-          </a:fillRef>
-          <a:effectRef idx="2">
-            <a:schemeClr val="accent1"/>
-          </a:effectRef>
-          <a:fontRef idx="minor">
-            <a:schemeClr val="lt1"/>
-          </a:fontRef>
-        </p:style>
-        <p:txBody>
-          <a:bodyPr rtlCol="0" anchor="ctr"/>
-          <a:lstStyle/>
-          <a:p>
-            <a:pPr algn="ctr"/>
-          </a:p>
-        </p:txBody>
-      </p:sp>
-      <p:sp>
-        <p:nvSpPr>
-          <p:cNvPr id="19" name="AGENT_SUMMARY_LABEL_1"/>
-          <p:cNvSpPr txBox="1"/>
-          <p:nvPr/>
-        </p:nvSpPr>
-        <p:spPr>
-          <a:xfrm>
-            <a:off x="960120" y="2377440"/>
-            <a:ext cx="1828800" cy="685800"/>
-          </a:xfrm>
-          <a:prstGeom prst="rect">
-            <a:avLst/>
-          </a:prstGeom>
-          <a:noFill/>
-        </p:spPr>
-        <p:txBody>
-          <a:bodyPr wrap="square" lIns="0" rIns="0" tIns="0" bIns="0" anchor="ctr">
-            <a:spAutoFit/>
-          </a:bodyPr>
-          <a:lstStyle/>
-          <a:p>
-            <a:pPr algn="l"/>
-            <a:r>
-              <a:rPr sz="1900" b="1" ea="Microsoft YaHei">
-                <a:solidFill>
-                  <a:srgbClr val="8B0D18"/>
-                </a:solidFill>
-                <a:latin typeface="Microsoft YaHei"/>
-              </a:rPr>
-              <a:t>卡在哪</a:t>
-            </a:r>
-          </a:p>
-        </p:txBody>
-      </p:sp>
-      <p:sp>
-        <p:nvSpPr>
-          <p:cNvPr id="20" name="AGENT_SUMMARY_VALUE_1"/>
-          <p:cNvSpPr txBox="1"/>
-          <p:nvPr/>
-        </p:nvSpPr>
-        <p:spPr>
-          <a:xfrm>
-            <a:off x="2926080" y="2377440"/>
-            <a:ext cx="7909560" cy="685800"/>
-          </a:xfrm>
-          <a:prstGeom prst="rect">
-            <a:avLst/>
-          </a:prstGeom>
-          <a:noFill/>
-        </p:spPr>
-        <p:txBody>
-          <a:bodyPr wrap="square" lIns="0" rIns="0" tIns="0" bIns="0" anchor="ctr">
-            <a:spAutoFit/>
-          </a:bodyPr>
-          <a:lstStyle/>
-          <a:p>
-            <a:pPr algn="l"/>
-            <a:r>
-              <a:rPr sz="1800" b="0" ea="Microsoft YaHei">
-                <a:solidFill>
-                  <a:srgbClr val="1E1E1E"/>
-                </a:solidFill>
-                <a:latin typeface="Microsoft YaHei"/>
-              </a:rPr>
-              <a:t>烧录→对拍→安全实测是串行门槛，不是没做</a:t>
-            </a:r>
-          </a:p>
-        </p:txBody>
-      </p:sp>
-      <p:sp>
-        <p:nvSpPr>
-          <p:cNvPr id="21" name="AGENT_SUMMARY_LINE_2"/>
-          <p:cNvSpPr/>
-          <p:nvPr/>
-        </p:nvSpPr>
-        <p:spPr>
-          <a:xfrm>
-            <a:off x="868680" y="3118104"/>
-            <a:ext cx="10378440" cy="10972"/>
-          </a:xfrm>
-          <a:prstGeom prst="rect">
-            <a:avLst/>
-          </a:prstGeom>
-          <a:solidFill>
-            <a:srgbClr val="8B0D18"/>
-          </a:solidFill>
-          <a:ln>
-            <a:noFill/>
-          </a:ln>
-        </p:spPr>
-        <p:style>
-          <a:lnRef idx="1">
-            <a:schemeClr val="accent1"/>
-          </a:lnRef>
-          <a:fillRef idx="3">
-            <a:schemeClr val="accent1"/>
-          </a:fillRef>
-          <a:effectRef idx="2">
-            <a:schemeClr val="accent1"/>
-          </a:effectRef>
-          <a:fontRef idx="minor">
-            <a:schemeClr val="lt1"/>
-          </a:fontRef>
-        </p:style>
-        <p:txBody>
-          <a:bodyPr rtlCol="0" anchor="ctr"/>
-          <a:lstStyle/>
-          <a:p>
-            <a:pPr algn="ctr"/>
-          </a:p>
-        </p:txBody>
-      </p:sp>
-      <p:sp>
-        <p:nvSpPr>
-          <p:cNvPr id="22" name="AGENT_SUMMARY_LABEL_2"/>
-          <p:cNvSpPr txBox="1"/>
-          <p:nvPr/>
-        </p:nvSpPr>
-        <p:spPr>
-          <a:xfrm>
-            <a:off x="960120" y="3227832"/>
-            <a:ext cx="1828800" cy="685800"/>
-          </a:xfrm>
-          <a:prstGeom prst="rect">
-            <a:avLst/>
-          </a:prstGeom>
-          <a:noFill/>
-        </p:spPr>
-        <p:txBody>
-          <a:bodyPr wrap="square" lIns="0" rIns="0" tIns="0" bIns="0" anchor="ctr">
-            <a:spAutoFit/>
-          </a:bodyPr>
-          <a:lstStyle/>
-          <a:p>
-            <a:pPr algn="l"/>
-            <a:r>
-              <a:rPr sz="1900" b="1" ea="Microsoft YaHei">
-                <a:solidFill>
-                  <a:srgbClr val="8B0D18"/>
-                </a:solidFill>
-                <a:latin typeface="Microsoft YaHei"/>
-              </a:rPr>
-              <a:t>本周期死线</a:t>
-            </a:r>
-          </a:p>
-        </p:txBody>
-      </p:sp>
-      <p:sp>
-        <p:nvSpPr>
-          <p:cNvPr id="23" name="AGENT_SUMMARY_VALUE_2"/>
-          <p:cNvSpPr txBox="1"/>
-          <p:nvPr/>
-        </p:nvSpPr>
-        <p:spPr>
-          <a:xfrm>
-            <a:off x="2926080" y="3227832"/>
-            <a:ext cx="7909560" cy="685800"/>
-          </a:xfrm>
-          <a:prstGeom prst="rect">
-            <a:avLst/>
-          </a:prstGeom>
-          <a:noFill/>
-        </p:spPr>
-        <p:txBody>
-          <a:bodyPr wrap="square" lIns="0" rIns="0" tIns="0" bIns="0" anchor="ctr">
-            <a:spAutoFit/>
-          </a:bodyPr>
-          <a:lstStyle/>
-          <a:p>
-            <a:pPr algn="l"/>
-            <a:r>
-              <a:rPr sz="1800" b="0" ea="Microsoft YaHei">
-                <a:solidFill>
-                  <a:srgbClr val="1E1E1E"/>
-                </a:solidFill>
-                <a:latin typeface="Microsoft YaHei"/>
-              </a:rPr>
-              <a:t>10 月中前秋季窗口：采集 + 自主沿行预实验</a:t>
-            </a:r>
-          </a:p>
-        </p:txBody>
-      </p:sp>
-      <p:sp>
-        <p:nvSpPr>
-          <p:cNvPr id="24" name="AGENT_SUMMARY_LINE_3"/>
-          <p:cNvSpPr/>
-          <p:nvPr/>
-        </p:nvSpPr>
-        <p:spPr>
-          <a:xfrm>
-            <a:off x="868680" y="3968496"/>
-            <a:ext cx="10378440" cy="10972"/>
-          </a:xfrm>
-          <a:prstGeom prst="rect">
-            <a:avLst/>
-          </a:prstGeom>
-          <a:solidFill>
-            <a:srgbClr val="8B0D18"/>
-          </a:solidFill>
-          <a:ln>
-            <a:noFill/>
-          </a:ln>
-        </p:spPr>
-        <p:style>
-          <a:lnRef idx="1">
-            <a:schemeClr val="accent1"/>
-          </a:lnRef>
-          <a:fillRef idx="3">
-            <a:schemeClr val="accent1"/>
-          </a:fillRef>
-          <a:effectRef idx="2">
-            <a:schemeClr val="accent1"/>
-          </a:effectRef>
-          <a:fontRef idx="minor">
-            <a:schemeClr val="lt1"/>
-          </a:fontRef>
-        </p:style>
-        <p:txBody>
-          <a:bodyPr rtlCol="0" anchor="ctr"/>
-          <a:lstStyle/>
-          <a:p>
-            <a:pPr algn="ctr"/>
-          </a:p>
-        </p:txBody>
-      </p:sp>
-      <p:sp>
-        <p:nvSpPr>
-          <p:cNvPr id="25" name="AGENT_SUMMARY_LABEL_3"/>
-          <p:cNvSpPr txBox="1"/>
-          <p:nvPr/>
-        </p:nvSpPr>
-        <p:spPr>
-          <a:xfrm>
-            <a:off x="960120" y="4078224"/>
-            <a:ext cx="1828800" cy="685800"/>
-          </a:xfrm>
-          <a:prstGeom prst="rect">
-            <a:avLst/>
-          </a:prstGeom>
-          <a:noFill/>
-        </p:spPr>
-        <p:txBody>
-          <a:bodyPr wrap="square" lIns="0" rIns="0" tIns="0" bIns="0" anchor="ctr">
-            <a:spAutoFit/>
-          </a:bodyPr>
-          <a:lstStyle/>
-          <a:p>
-            <a:pPr algn="l"/>
-            <a:r>
-              <a:rPr sz="1900" b="1" ea="Microsoft YaHei">
-                <a:solidFill>
-                  <a:srgbClr val="8B0D18"/>
-                </a:solidFill>
-                <a:latin typeface="Microsoft YaHei"/>
-              </a:rPr>
-              <a:t>秋季做</a:t>
-            </a:r>
-          </a:p>
-        </p:txBody>
-      </p:sp>
-      <p:sp>
-        <p:nvSpPr>
-          <p:cNvPr id="26" name="AGENT_SUMMARY_VALUE_3"/>
-          <p:cNvSpPr txBox="1"/>
-          <p:nvPr/>
-        </p:nvSpPr>
-        <p:spPr>
-          <a:xfrm>
-            <a:off x="2926080" y="4078224"/>
-            <a:ext cx="7909560" cy="685800"/>
-          </a:xfrm>
-          <a:prstGeom prst="rect">
-            <a:avLst/>
-          </a:prstGeom>
-          <a:noFill/>
-        </p:spPr>
-        <p:txBody>
-          <a:bodyPr wrap="square" lIns="0" rIns="0" tIns="0" bIns="0" anchor="ctr">
-            <a:spAutoFit/>
-          </a:bodyPr>
-          <a:lstStyle/>
-          <a:p>
-            <a:pPr algn="l"/>
-            <a:r>
-              <a:rPr sz="1800" b="0" ea="Microsoft YaHei">
-                <a:solidFill>
-                  <a:srgbClr val="1E1E1E"/>
-                </a:solidFill>
-                <a:latin typeface="Microsoft YaHei"/>
-              </a:rPr>
-              <a:t>刀抬起空跑，只测沿行偏差与失效记录</a:t>
-            </a:r>
-          </a:p>
-        </p:txBody>
-      </p:sp>
-      <p:sp>
-        <p:nvSpPr>
-          <p:cNvPr id="27" name="AGENT_SUMMARY_LINE_4"/>
-          <p:cNvSpPr/>
-          <p:nvPr/>
-        </p:nvSpPr>
-        <p:spPr>
-          <a:xfrm>
-            <a:off x="868680" y="4818888"/>
-            <a:ext cx="10378440" cy="10972"/>
-          </a:xfrm>
-          <a:prstGeom prst="rect">
-            <a:avLst/>
-          </a:prstGeom>
-          <a:solidFill>
-            <a:srgbClr val="8B0D18"/>
-          </a:solidFill>
-          <a:ln>
-            <a:noFill/>
-          </a:ln>
-        </p:spPr>
-        <p:style>
-          <a:lnRef idx="1">
-            <a:schemeClr val="accent1"/>
-          </a:lnRef>
-          <a:fillRef idx="3">
-            <a:schemeClr val="accent1"/>
-          </a:fillRef>
-          <a:effectRef idx="2">
-            <a:schemeClr val="accent1"/>
-          </a:effectRef>
-          <a:fontRef idx="minor">
-            <a:schemeClr val="lt1"/>
-          </a:fontRef>
-        </p:style>
-        <p:txBody>
-          <a:bodyPr rtlCol="0" anchor="ctr"/>
-          <a:lstStyle/>
-          <a:p>
-            <a:pPr algn="ctr"/>
-          </a:p>
-        </p:txBody>
-      </p:sp>
-      <p:sp>
-        <p:nvSpPr>
-          <p:cNvPr id="28" name="AGENT_SUMMARY_LABEL_4"/>
-          <p:cNvSpPr txBox="1"/>
-          <p:nvPr/>
-        </p:nvSpPr>
-        <p:spPr>
-          <a:xfrm>
-            <a:off x="960120" y="4928616"/>
-            <a:ext cx="1828800" cy="685800"/>
-          </a:xfrm>
-          <a:prstGeom prst="rect">
-            <a:avLst/>
-          </a:prstGeom>
-          <a:noFill/>
-        </p:spPr>
-        <p:txBody>
-          <a:bodyPr wrap="square" lIns="0" rIns="0" tIns="0" bIns="0" anchor="ctr">
-            <a:spAutoFit/>
-          </a:bodyPr>
-          <a:lstStyle/>
-          <a:p>
-            <a:pPr algn="l"/>
-            <a:r>
-              <a:rPr sz="1900" b="1" ea="Microsoft YaHei">
-                <a:solidFill>
-                  <a:srgbClr val="8B0D18"/>
-                </a:solidFill>
-                <a:latin typeface="Microsoft YaHei"/>
-              </a:rPr>
-              <a:t>春季做</a:t>
-            </a:r>
-          </a:p>
-        </p:txBody>
-      </p:sp>
-      <p:sp>
-        <p:nvSpPr>
-          <p:cNvPr id="29" name="AGENT_SUMMARY_VALUE_4"/>
-          <p:cNvSpPr txBox="1"/>
-          <p:nvPr/>
-        </p:nvSpPr>
-        <p:spPr>
-          <a:xfrm>
-            <a:off x="2926080" y="4928616"/>
-            <a:ext cx="7909560" cy="685800"/>
-          </a:xfrm>
-          <a:prstGeom prst="rect">
-            <a:avLst/>
-          </a:prstGeom>
-          <a:noFill/>
-        </p:spPr>
-        <p:txBody>
-          <a:bodyPr wrap="square" lIns="0" rIns="0" tIns="0" bIns="0" anchor="ctr">
-            <a:spAutoFit/>
-          </a:bodyPr>
-          <a:lstStyle/>
-          <a:p>
-            <a:pPr algn="l"/>
-            <a:r>
-              <a:rPr sz="1800" b="0" ea="Microsoft YaHei">
-                <a:solidFill>
-                  <a:srgbClr val="1E1E1E"/>
-                </a:solidFill>
-                <a:latin typeface="Microsoft YaHei"/>
-              </a:rPr>
-              <a:t>刀控接入、主动刀对固定刀、除草率与伤苗率</a:t>
-            </a:r>
-          </a:p>
-        </p:txBody>
-      </p:sp>
-      <p:sp>
-        <p:nvSpPr>
-          <p:cNvPr id="30" name="AGENT_TAKEAWAY"/>
-          <p:cNvSpPr txBox="1"/>
-          <p:nvPr/>
-        </p:nvSpPr>
-        <p:spPr>
-          <a:xfrm>
-            <a:off x="868680" y="5989320"/>
-            <a:ext cx="10195560" cy="274320"/>
-          </a:xfrm>
-          <a:prstGeom prst="rect">
-            <a:avLst/>
-          </a:prstGeom>
-          <a:noFill/>
-        </p:spPr>
-        <p:txBody>
-          <a:bodyPr wrap="square" lIns="0" rIns="0" tIns="0" bIns="0" anchor="ctr">
-            <a:spAutoFit/>
-          </a:bodyPr>
-          <a:lstStyle/>
-          <a:p>
-            <a:pPr algn="l"/>
-            <a:r>
-              <a:rPr sz="1600" b="1" ea="Microsoft YaHei">
-                <a:solidFill>
-                  <a:srgbClr val="8B0D18"/>
-                </a:solidFill>
-                <a:latin typeface="Microsoft YaHei"/>
-              </a:rPr>
-              <a:t>禁止实车 AUTO 与带动力接线的门槛，目前仍未解除</a:t>
-            </a:r>
-          </a:p>
-        </p:txBody>
-      </p:sp>
-    </p:spTree>
-  </p:cSld>
-  <p:clrMapOvr>
-    <a:masterClrMapping/>
-  </p:clrMapOvr>
-</p:sld>
-</file>
-
-<file path=ppt/slides/slide18.xml><?xml version="1.0" encoding="utf-8"?>
-<p:sld xmlns:a="http://schemas.openxmlformats.org/drawingml/2006/main" xmlns:p="http://schemas.openxmlformats.org/presentationml/2006/main" xmlns:r="http://schemas.openxmlformats.org/officeDocument/2006/relationships">
-  <p:cSld>
-    <p:spTree>
-      <p:nvGrpSpPr>
-        <p:cNvPr id="1" name=""/>
-        <p:cNvGrpSpPr/>
-        <p:nvPr/>
-      </p:nvGrpSpPr>
-      <p:grpSpPr/>
-      <p:sp>
-        <p:nvSpPr>
           <p:cNvPr id="2" name="AGENT_CLOSING"/>
           <p:cNvSpPr txBox="1"/>
           <p:nvPr/>
@@ -10860,7 +9663,7 @@
                 </a:solidFill>
                 <a:latin typeface="Microsoft YaHei"/>
               </a:rPr>
-              <a:t>进度与下一步</a:t>
+              <a:t>小结与讨论</a:t>
             </a:r>
           </a:p>
         </p:txBody>
@@ -11501,7 +10304,7 @@
                 </a:solidFill>
                 <a:latin typeface="Microsoft YaHei"/>
               </a:rPr>
-              <a:t>进度与下一步</a:t>
+              <a:t>小结与讨论</a:t>
             </a:r>
           </a:p>
         </p:txBody>
@@ -11663,7 +10466,7 @@
         <p:spPr>
           <a:xfrm>
             <a:off x="960120" y="1527048"/>
-            <a:ext cx="1828800" cy="685800"/>
+            <a:ext cx="1828800" cy="898398"/>
           </a:xfrm>
           <a:prstGeom prst="rect">
             <a:avLst/>
@@ -11698,7 +10501,7 @@
         <p:spPr>
           <a:xfrm>
             <a:off x="2926080" y="1527048"/>
-            <a:ext cx="7909560" cy="685800"/>
+            <a:ext cx="7909560" cy="898398"/>
           </a:xfrm>
           <a:prstGeom prst="rect">
             <a:avLst/>
@@ -11719,7 +10522,7 @@
                 </a:solidFill>
                 <a:latin typeface="Microsoft YaHei"/>
               </a:rPr>
-              <a:t>30~60 cm，轮距与刀间距机械可调</a:t>
+              <a:t>30~40 cm，轮距与刀间距机械可调</a:t>
             </a:r>
           </a:p>
         </p:txBody>
@@ -11732,7 +10535,7 @@
         </p:nvSpPr>
         <p:spPr>
           <a:xfrm>
-            <a:off x="868680" y="2267712"/>
+            <a:off x="868680" y="2480310"/>
             <a:ext cx="10378440" cy="10972"/>
           </a:xfrm>
           <a:prstGeom prst="rect">
@@ -11775,8 +10578,8 @@
         </p:nvSpPr>
         <p:spPr>
           <a:xfrm>
-            <a:off x="960120" y="2377440"/>
-            <a:ext cx="1828800" cy="685800"/>
+            <a:off x="960120" y="2590038"/>
+            <a:ext cx="1828800" cy="898398"/>
           </a:xfrm>
           <a:prstGeom prst="rect">
             <a:avLst/>
@@ -11810,8 +10613,8 @@
         </p:nvSpPr>
         <p:spPr>
           <a:xfrm>
-            <a:off x="2926080" y="2377440"/>
-            <a:ext cx="7909560" cy="685800"/>
+            <a:off x="2926080" y="2590038"/>
+            <a:ext cx="7909560" cy="898398"/>
           </a:xfrm>
           <a:prstGeom prst="rect">
             <a:avLst/>
@@ -11832,7 +10635,7 @@
                 </a:solidFill>
                 <a:latin typeface="Microsoft YaHei"/>
               </a:rPr>
-              <a:t>坡地 5~15°</a:t>
+              <a:t>0~15°</a:t>
             </a:r>
           </a:p>
         </p:txBody>
@@ -11845,7 +10648,7 @@
         </p:nvSpPr>
         <p:spPr>
           <a:xfrm>
-            <a:off x="868680" y="3118104"/>
+            <a:off x="868680" y="3543300"/>
             <a:ext cx="10378440" cy="10972"/>
           </a:xfrm>
           <a:prstGeom prst="rect">
@@ -11888,8 +10691,8 @@
         </p:nvSpPr>
         <p:spPr>
           <a:xfrm>
-            <a:off x="960120" y="3227832"/>
-            <a:ext cx="1828800" cy="685800"/>
+            <a:off x="960120" y="3653028"/>
+            <a:ext cx="1828800" cy="898398"/>
           </a:xfrm>
           <a:prstGeom prst="rect">
             <a:avLst/>
@@ -11923,8 +10726,8 @@
         </p:nvSpPr>
         <p:spPr>
           <a:xfrm>
-            <a:off x="2926080" y="3227832"/>
-            <a:ext cx="7909560" cy="685800"/>
+            <a:off x="2926080" y="3653028"/>
+            <a:ext cx="7909560" cy="898398"/>
           </a:xfrm>
           <a:prstGeom prst="rect">
             <a:avLst/>
@@ -11945,7 +10748,7 @@
                 </a:solidFill>
                 <a:latin typeface="Microsoft YaHei"/>
               </a:rPr>
-              <a:t>30 mm、误差 ±5 mm（设计目标，未实测）</a:t>
+              <a:t>30 mm、误差 ±5 mm</a:t>
             </a:r>
           </a:p>
         </p:txBody>
@@ -11958,7 +10761,7 @@
         </p:nvSpPr>
         <p:spPr>
           <a:xfrm>
-            <a:off x="868680" y="3968496"/>
+            <a:off x="868680" y="4606290"/>
             <a:ext cx="10378440" cy="10972"/>
           </a:xfrm>
           <a:prstGeom prst="rect">
@@ -12001,8 +10804,8 @@
         </p:nvSpPr>
         <p:spPr>
           <a:xfrm>
-            <a:off x="960120" y="4078224"/>
-            <a:ext cx="1828800" cy="685800"/>
+            <a:off x="960120" y="4716018"/>
+            <a:ext cx="1828800" cy="898398"/>
           </a:xfrm>
           <a:prstGeom prst="rect">
             <a:avLst/>
@@ -12036,8 +10839,8 @@
         </p:nvSpPr>
         <p:spPr>
           <a:xfrm>
-            <a:off x="2926080" y="4078224"/>
-            <a:ext cx="7909560" cy="685800"/>
+            <a:off x="2926080" y="4716018"/>
+            <a:ext cx="7909560" cy="898398"/>
           </a:xfrm>
           <a:prstGeom prst="rect">
             <a:avLst/>
@@ -12065,120 +10868,7 @@
       </p:sp>
       <p:sp>
         <p:nvSpPr>
-          <p:cNvPr id="27" name="AGENT_SUMMARY_LINE_4"/>
-          <p:cNvSpPr/>
-          <p:nvPr/>
-        </p:nvSpPr>
-        <p:spPr>
-          <a:xfrm>
-            <a:off x="868680" y="4818888"/>
-            <a:ext cx="10378440" cy="10972"/>
-          </a:xfrm>
-          <a:prstGeom prst="rect">
-            <a:avLst/>
-          </a:prstGeom>
-          <a:solidFill>
-            <a:srgbClr val="8B0D18"/>
-          </a:solidFill>
-          <a:ln>
-            <a:noFill/>
-          </a:ln>
-        </p:spPr>
-        <p:style>
-          <a:lnRef idx="1">
-            <a:schemeClr val="accent1"/>
-          </a:lnRef>
-          <a:fillRef idx="3">
-            <a:schemeClr val="accent1"/>
-          </a:fillRef>
-          <a:effectRef idx="2">
-            <a:schemeClr val="accent1"/>
-          </a:effectRef>
-          <a:fontRef idx="minor">
-            <a:schemeClr val="lt1"/>
-          </a:fontRef>
-        </p:style>
-        <p:txBody>
-          <a:bodyPr rtlCol="0" anchor="ctr"/>
-          <a:lstStyle/>
-          <a:p>
-            <a:pPr algn="ctr"/>
-          </a:p>
-        </p:txBody>
-      </p:sp>
-      <p:sp>
-        <p:nvSpPr>
-          <p:cNvPr id="28" name="AGENT_SUMMARY_LABEL_4"/>
-          <p:cNvSpPr txBox="1"/>
-          <p:nvPr/>
-        </p:nvSpPr>
-        <p:spPr>
-          <a:xfrm>
-            <a:off x="960120" y="4928616"/>
-            <a:ext cx="1828800" cy="685800"/>
-          </a:xfrm>
-          <a:prstGeom prst="rect">
-            <a:avLst/>
-          </a:prstGeom>
-          <a:noFill/>
-        </p:spPr>
-        <p:txBody>
-          <a:bodyPr wrap="square" lIns="0" rIns="0" tIns="0" bIns="0" anchor="ctr">
-            <a:spAutoFit/>
-          </a:bodyPr>
-          <a:lstStyle/>
-          <a:p>
-            <a:pPr algn="l"/>
-            <a:r>
-              <a:rPr sz="1900" b="1" ea="Microsoft YaHei">
-                <a:solidFill>
-                  <a:srgbClr val="8B0D18"/>
-                </a:solidFill>
-                <a:latin typeface="Microsoft YaHei"/>
-              </a:rPr>
-              <a:t>未登记项</a:t>
-            </a:r>
-          </a:p>
-        </p:txBody>
-      </p:sp>
-      <p:sp>
-        <p:nvSpPr>
-          <p:cNvPr id="29" name="AGENT_SUMMARY_VALUE_4"/>
-          <p:cNvSpPr txBox="1"/>
-          <p:nvPr/>
-        </p:nvSpPr>
-        <p:spPr>
-          <a:xfrm>
-            <a:off x="2926080" y="4928616"/>
-            <a:ext cx="7909560" cy="685800"/>
-          </a:xfrm>
-          <a:prstGeom prst="rect">
-            <a:avLst/>
-          </a:prstGeom>
-          <a:noFill/>
-        </p:spPr>
-        <p:txBody>
-          <a:bodyPr wrap="square" lIns="0" rIns="0" tIns="0" bIns="0" anchor="ctr">
-            <a:spAutoFit/>
-          </a:bodyPr>
-          <a:lstStyle/>
-          <a:p>
-            <a:pPr algn="l"/>
-            <a:r>
-              <a:rPr sz="1800" b="0" ea="Microsoft YaHei">
-                <a:solidFill>
-                  <a:srgbClr val="1E1E1E"/>
-                </a:solidFill>
-                <a:latin typeface="Microsoft YaHei"/>
-              </a:rPr>
-              <a:t>株丛直径、杂草种名、作业次数 → 待实测</a:t>
-            </a:r>
-          </a:p>
-        </p:txBody>
-      </p:sp>
-      <p:sp>
-        <p:nvSpPr>
-          <p:cNvPr id="30" name="AGENT_TAKEAWAY"/>
+          <p:cNvPr id="27" name="AGENT_TAKEAWAY"/>
           <p:cNvSpPr txBox="1"/>
           <p:nvPr/>
         </p:nvSpPr>
@@ -12624,7 +11314,7 @@
                 </a:solidFill>
                 <a:latin typeface="Microsoft YaHei"/>
               </a:rPr>
-              <a:t>进度与下一步</a:t>
+              <a:t>小结与讨论</a:t>
             </a:r>
           </a:p>
         </p:txBody>
@@ -13266,7 +11956,7 @@
                 </a:solidFill>
                 <a:latin typeface="Microsoft YaHei"/>
               </a:rPr>
-              <a:t>进度与下一步</a:t>
+              <a:t>小结与讨论</a:t>
             </a:r>
           </a:p>
         </p:txBody>
@@ -13970,7 +12660,7 @@
                 </a:solidFill>
                 <a:latin typeface="Microsoft YaHei"/>
               </a:rPr>
-              <a:t>进度与下一步</a:t>
+              <a:t>小结与讨论</a:t>
             </a:r>
           </a:p>
         </p:txBody>
@@ -14981,7 +13671,7 @@
                 </a:solidFill>
                 <a:latin typeface="Microsoft YaHei"/>
               </a:rPr>
-              <a:t>进度与下一步</a:t>
+              <a:t>小结与讨论</a:t>
             </a:r>
           </a:p>
         </p:txBody>
@@ -15623,7 +14313,7 @@
                 </a:solidFill>
                 <a:latin typeface="Microsoft YaHei"/>
               </a:rPr>
-              <a:t>进度与下一步</a:t>
+              <a:t>小结与讨论</a:t>
             </a:r>
           </a:p>
         </p:txBody>
@@ -16325,7 +15015,7 @@
                 </a:solidFill>
                 <a:latin typeface="Microsoft YaHei"/>
               </a:rPr>
-              <a:t>进度与下一步</a:t>
+              <a:t>小结与讨论</a:t>
             </a:r>
           </a:p>
         </p:txBody>
@@ -16430,7 +15120,7 @@
                 </a:solidFill>
                 <a:latin typeface="Microsoft YaHei"/>
               </a:rPr>
-              <a:t>分割选 DeepLabV3+，峰值 mIoU 0.7459</a:t>
+              <a:t>分割选 DeepLabV3+</a:t>
             </a:r>
           </a:p>
         </p:txBody>
@@ -16512,44 +15202,7 @@
               </a:rPr>
               <a:t>1. 任务是二分类：作物 / 背景（背景含杂草与裸土）
 2. 选 DeepLabV3+ 配 MobileNetV2：端侧算力与实时性优先
-3. 不追高分辨率网络：要的是墙的位置，不是像素级轮廓
-4. 训练 202 轮，验证集 mIoU 峰值 0.7459 出现在第 76 轮
-5. 同批指标：dice 0.7762@78、mPA 0.8643@129、前景 IoU 0.6352</a:t>
-            </a:r>
-          </a:p>
-        </p:txBody>
-      </p:sp>
-      <p:sp>
-        <p:nvSpPr>
-          <p:cNvPr id="17" name="AGENT_TAKEAWAY"/>
-          <p:cNvSpPr txBox="1"/>
-          <p:nvPr/>
-        </p:nvSpPr>
-        <p:spPr>
-          <a:xfrm>
-            <a:off x="868680" y="5989320"/>
-            <a:ext cx="10195560" cy="274320"/>
-          </a:xfrm>
-          <a:prstGeom prst="rect">
-            <a:avLst/>
-          </a:prstGeom>
-          <a:noFill/>
-        </p:spPr>
-        <p:txBody>
-          <a:bodyPr wrap="square" lIns="0" rIns="0" tIns="0" bIns="0" anchor="ctr">
-            <a:spAutoFit/>
-          </a:bodyPr>
-          <a:lstStyle/>
-          <a:p>
-            <a:pPr algn="l"/>
-            <a:r>
-              <a:rPr sz="1600" b="1" ea="Microsoft YaHei">
-                <a:solidFill>
-                  <a:srgbClr val="8B0D18"/>
-                </a:solidFill>
-                <a:latin typeface="Microsoft YaHei"/>
-              </a:rPr>
-              <a:t>以上为夏季域验证集结果，秋季域指标尚未产出</a:t>
+3. 不追高分辨率网络：要的是墙的位置，不是像素级轮廓</a:t>
             </a:r>
           </a:p>
         </p:txBody>

--- a/docs/组会汇报_20260916/组会汇报_纯视觉芍药行间除草机器人_20260916.pptx
+++ b/docs/组会汇报_20260916/组会汇报_纯视觉芍药行间除草机器人_20260916.pptx
@@ -3289,42 +3289,7 @@
       </p:sp>
       <p:sp>
         <p:nvSpPr>
-          <p:cNvPr id="7" name="AGENT_TAKEAWAY"/>
-          <p:cNvSpPr txBox="1"/>
-          <p:nvPr/>
-        </p:nvSpPr>
-        <p:spPr>
-          <a:xfrm>
-            <a:off x="1005840" y="4937760"/>
-            <a:ext cx="10149840" cy="292608"/>
-          </a:xfrm>
-          <a:prstGeom prst="rect">
-            <a:avLst/>
-          </a:prstGeom>
-          <a:noFill/>
-        </p:spPr>
-        <p:txBody>
-          <a:bodyPr wrap="square" lIns="0" rIns="0" tIns="0" bIns="0" anchor="ctr">
-            <a:spAutoFit/>
-          </a:bodyPr>
-          <a:lstStyle/>
-          <a:p>
-            <a:pPr algn="ctr"/>
-            <a:r>
-              <a:rPr sz="1500" b="0" ea="Microsoft YaHei">
-                <a:solidFill>
-                  <a:srgbClr val="8B0D18"/>
-                </a:solidFill>
-                <a:latin typeface="Microsoft YaHei"/>
-              </a:rPr>
-              <a:t>本周期进展：除草机构选型完成；进土深度反馈缺失，提请讨论</a:t>
-            </a:r>
-          </a:p>
-        </p:txBody>
-      </p:sp>
-      <p:sp>
-        <p:nvSpPr>
-          <p:cNvPr id="8" name="AGENT_COVER_BOTTOM_BAND"/>
+          <p:cNvPr id="7" name="AGENT_COVER_BOTTOM_BAND"/>
           <p:cNvSpPr/>
           <p:nvPr/>
         </p:nvSpPr>
@@ -5666,41 +5631,6 @@
           </a:p>
         </p:txBody>
       </p:sp>
-      <p:sp>
-        <p:nvSpPr>
-          <p:cNvPr id="17" name="AGENT_TAKEAWAY"/>
-          <p:cNvSpPr txBox="1"/>
-          <p:nvPr/>
-        </p:nvSpPr>
-        <p:spPr>
-          <a:xfrm>
-            <a:off x="868680" y="5989320"/>
-            <a:ext cx="10195560" cy="274320"/>
-          </a:xfrm>
-          <a:prstGeom prst="rect">
-            <a:avLst/>
-          </a:prstGeom>
-          <a:noFill/>
-        </p:spPr>
-        <p:txBody>
-          <a:bodyPr wrap="square" lIns="0" rIns="0" tIns="0" bIns="0" anchor="ctr">
-            <a:spAutoFit/>
-          </a:bodyPr>
-          <a:lstStyle/>
-          <a:p>
-            <a:pPr algn="l"/>
-            <a:r>
-              <a:rPr sz="1600" b="1" ea="Microsoft YaHei">
-                <a:solidFill>
-                  <a:srgbClr val="8B0D18"/>
-                </a:solidFill>
-                <a:latin typeface="Microsoft YaHei"/>
-              </a:rPr>
-              <a:t>差速 AUTO 的结果不能写成四轮转向自主控制已实现</a:t>
-            </a:r>
-          </a:p>
-        </p:txBody>
-      </p:sp>
     </p:spTree>
   </p:cSld>
   <p:clrMapOvr>
@@ -6301,44 +6231,9 @@
               </a:rPr>
               <a:t>1. 相机装在车架上，量的是“行相对车”的偏移
 2. 刀在滑台上移过去了，图像里那个偏移量并不会变小
-3. 现在代码把这个不会变的量当误差，输出一直加到 50 mm 限幅
+3. 现在代码把这个不变量当误差，输出会一直加到 50 mm 限幅（纯函数复现，非整车）
 4. 真误差 = 目标刀位（图像给）− 刀位实测 q（现在没有）
 5. 所以先补刀位测量，再谈主动对刀闭环</a:t>
-            </a:r>
-          </a:p>
-        </p:txBody>
-      </p:sp>
-      <p:sp>
-        <p:nvSpPr>
-          <p:cNvPr id="17" name="AGENT_TAKEAWAY"/>
-          <p:cNvSpPr txBox="1"/>
-          <p:nvPr/>
-        </p:nvSpPr>
-        <p:spPr>
-          <a:xfrm>
-            <a:off x="868680" y="5989320"/>
-            <a:ext cx="10195560" cy="274320"/>
-          </a:xfrm>
-          <a:prstGeom prst="rect">
-            <a:avLst/>
-          </a:prstGeom>
-          <a:noFill/>
-        </p:spPr>
-        <p:txBody>
-          <a:bodyPr wrap="square" lIns="0" rIns="0" tIns="0" bIns="0" anchor="ctr">
-            <a:spAutoFit/>
-          </a:bodyPr>
-          <a:lstStyle/>
-          <a:p>
-            <a:pPr algn="l"/>
-            <a:r>
-              <a:rPr sz="1600" b="1" ea="Microsoft YaHei">
-                <a:solidFill>
-                  <a:srgbClr val="8B0D18"/>
-                </a:solidFill>
-                <a:latin typeface="Microsoft YaHei"/>
-              </a:rPr>
-              <a:t>那组限幅数字是纯函数复现，只说明机制，不代表整车会失稳</a:t>
             </a:r>
           </a:p>
         </p:txBody>
@@ -7431,41 +7326,6 @@
           </a:p>
         </p:txBody>
       </p:sp>
-      <p:sp>
-        <p:nvSpPr>
-          <p:cNvPr id="30" name="AGENT_TAKEAWAY"/>
-          <p:cNvSpPr txBox="1"/>
-          <p:nvPr/>
-        </p:nvSpPr>
-        <p:spPr>
-          <a:xfrm>
-            <a:off x="868680" y="5989320"/>
-            <a:ext cx="10195560" cy="274320"/>
-          </a:xfrm>
-          <a:prstGeom prst="rect">
-            <a:avLst/>
-          </a:prstGeom>
-          <a:noFill/>
-        </p:spPr>
-        <p:txBody>
-          <a:bodyPr wrap="square" lIns="0" rIns="0" tIns="0" bIns="0" anchor="ctr">
-            <a:spAutoFit/>
-          </a:bodyPr>
-          <a:lstStyle/>
-          <a:p>
-            <a:pPr algn="l"/>
-            <a:r>
-              <a:rPr sz="1600" b="1" ea="Microsoft YaHei">
-                <a:solidFill>
-                  <a:srgbClr val="8B0D18"/>
-                </a:solidFill>
-                <a:latin typeface="Microsoft YaHei"/>
-              </a:rPr>
-              <a:t>10 mm/s 意味着全程 20 s，急停提刀时间指标要重评</a:t>
-            </a:r>
-          </a:p>
-        </p:txBody>
-      </p:sp>
     </p:spTree>
   </p:cSld>
   <p:clrMapOvr>
@@ -8067,43 +7927,8 @@
               <a:t>1. 挂草缠绕与撞石头都要求立刻抬刀，现在两条都做不到
 2. 电推杆只有通电正反转，无位置与负载反馈；协议里也没有深度字段
 3. 撞石是瞬时冲击：10 mm/s 抬 50 mm 要 5 秒，靠推杆根本来不及
-4. 挂草是缓变负载：可试用电流判据，但采样通道是否覆盖推杆待跟线
+4. 挂草是缓变负载：可试用电流判据，但通道覆盖推杆待跟线且阈值须台架标定
 5. 后果：轻则漏草，重则刀体变形、推杆烧毁、伤芍药根系</a:t>
-            </a:r>
-          </a:p>
-        </p:txBody>
-      </p:sp>
-      <p:sp>
-        <p:nvSpPr>
-          <p:cNvPr id="17" name="AGENT_TAKEAWAY"/>
-          <p:cNvSpPr txBox="1"/>
-          <p:nvPr/>
-        </p:nvSpPr>
-        <p:spPr>
-          <a:xfrm>
-            <a:off x="868680" y="5989320"/>
-            <a:ext cx="10195560" cy="274320"/>
-          </a:xfrm>
-          <a:prstGeom prst="rect">
-            <a:avLst/>
-          </a:prstGeom>
-          <a:noFill/>
-        </p:spPr>
-        <p:txBody>
-          <a:bodyPr wrap="square" lIns="0" rIns="0" tIns="0" bIns="0" anchor="ctr">
-            <a:spAutoFit/>
-          </a:bodyPr>
-          <a:lstStyle/>
-          <a:p>
-            <a:pPr algn="l"/>
-            <a:r>
-              <a:rPr sz="1600" b="1" ea="Microsoft YaHei">
-                <a:solidFill>
-                  <a:srgbClr val="8B0D18"/>
-                </a:solidFill>
-                <a:latin typeface="Microsoft YaHei"/>
-              </a:rPr>
-              <a:t>这不是定深精度问题，是过载保护缺失问题</a:t>
             </a:r>
           </a:p>
         </p:txBody>
@@ -9083,41 +8908,6 @@
           </a:p>
         </p:txBody>
       </p:sp>
-      <p:sp>
-        <p:nvSpPr>
-          <p:cNvPr id="27" name="AGENT_TAKEAWAY"/>
-          <p:cNvSpPr txBox="1"/>
-          <p:nvPr/>
-        </p:nvSpPr>
-        <p:spPr>
-          <a:xfrm>
-            <a:off x="868680" y="5989320"/>
-            <a:ext cx="10195560" cy="274320"/>
-          </a:xfrm>
-          <a:prstGeom prst="rect">
-            <a:avLst/>
-          </a:prstGeom>
-          <a:noFill/>
-        </p:spPr>
-        <p:txBody>
-          <a:bodyPr wrap="square" lIns="0" rIns="0" tIns="0" bIns="0" anchor="ctr">
-            <a:spAutoFit/>
-          </a:bodyPr>
-          <a:lstStyle/>
-          <a:p>
-            <a:pPr algn="l"/>
-            <a:r>
-              <a:rPr sz="1600" b="1" ea="Microsoft YaHei">
-                <a:solidFill>
-                  <a:srgbClr val="8B0D18"/>
-                </a:solidFill>
-                <a:latin typeface="Microsoft YaHei"/>
-              </a:rPr>
-              <a:t>请组会定：机械卸载先上，电流辨草作为下一步研究内容</a:t>
-            </a:r>
-          </a:p>
-        </p:txBody>
-      </p:sp>
     </p:spTree>
   </p:cSld>
   <p:clrMapOvr>
@@ -9856,41 +9646,6 @@
           </a:p>
         </p:txBody>
       </p:sp>
-      <p:sp>
-        <p:nvSpPr>
-          <p:cNvPr id="17" name="AGENT_TAKEAWAY"/>
-          <p:cNvSpPr txBox="1"/>
-          <p:nvPr/>
-        </p:nvSpPr>
-        <p:spPr>
-          <a:xfrm>
-            <a:off x="868680" y="5989320"/>
-            <a:ext cx="10195560" cy="274320"/>
-          </a:xfrm>
-          <a:prstGeom prst="rect">
-            <a:avLst/>
-          </a:prstGeom>
-          <a:noFill/>
-        </p:spPr>
-        <p:txBody>
-          <a:bodyPr wrap="square" lIns="0" rIns="0" tIns="0" bIns="0" anchor="ctr">
-            <a:spAutoFit/>
-          </a:bodyPr>
-          <a:lstStyle/>
-          <a:p>
-            <a:pPr algn="l"/>
-            <a:r>
-              <a:rPr sz="1600" b="1" ea="Microsoft YaHei">
-                <a:solidFill>
-                  <a:srgbClr val="8B0D18"/>
-                </a:solidFill>
-                <a:latin typeface="Microsoft YaHei"/>
-              </a:rPr>
-              <a:t>问题由农艺约束提出，不是由算力提出</a:t>
-            </a:r>
-          </a:p>
-        </p:txBody>
-      </p:sp>
     </p:spTree>
   </p:cSld>
   <p:clrMapOvr>
@@ -10866,41 +10621,6 @@
           </a:p>
         </p:txBody>
       </p:sp>
-      <p:sp>
-        <p:nvSpPr>
-          <p:cNvPr id="27" name="AGENT_TAKEAWAY"/>
-          <p:cNvSpPr txBox="1"/>
-          <p:nvPr/>
-        </p:nvSpPr>
-        <p:spPr>
-          <a:xfrm>
-            <a:off x="868680" y="5989320"/>
-            <a:ext cx="10195560" cy="274320"/>
-          </a:xfrm>
-          <a:prstGeom prst="rect">
-            <a:avLst/>
-          </a:prstGeom>
-          <a:noFill/>
-        </p:spPr>
-        <p:txBody>
-          <a:bodyPr wrap="square" lIns="0" rIns="0" tIns="0" bIns="0" anchor="ctr">
-            <a:spAutoFit/>
-          </a:bodyPr>
-          <a:lstStyle/>
-          <a:p>
-            <a:pPr algn="l"/>
-            <a:r>
-              <a:rPr sz="1600" b="1" ea="Microsoft YaHei">
-                <a:solidFill>
-                  <a:srgbClr val="8B0D18"/>
-                </a:solidFill>
-                <a:latin typeface="Microsoft YaHei"/>
-              </a:rPr>
-              <a:t>凡未登记的量一律标待实测，不用常识补值</a:t>
-            </a:r>
-          </a:p>
-        </p:txBody>
-      </p:sp>
     </p:spTree>
   </p:cSld>
   <p:clrMapOvr>
@@ -11508,41 +11228,6 @@
           </a:p>
         </p:txBody>
       </p:sp>
-      <p:sp>
-        <p:nvSpPr>
-          <p:cNvPr id="17" name="AGENT_TAKEAWAY"/>
-          <p:cNvSpPr txBox="1"/>
-          <p:nvPr/>
-        </p:nvSpPr>
-        <p:spPr>
-          <a:xfrm>
-            <a:off x="868680" y="5989320"/>
-            <a:ext cx="10195560" cy="274320"/>
-          </a:xfrm>
-          <a:prstGeom prst="rect">
-            <a:avLst/>
-          </a:prstGeom>
-          <a:noFill/>
-        </p:spPr>
-        <p:txBody>
-          <a:bodyPr wrap="square" lIns="0" rIns="0" tIns="0" bIns="0" anchor="ctr">
-            <a:spAutoFit/>
-          </a:bodyPr>
-          <a:lstStyle/>
-          <a:p>
-            <a:pPr algn="l"/>
-            <a:r>
-              <a:rPr sz="1600" b="1" ea="Microsoft YaHei">
-                <a:solidFill>
-                  <a:srgbClr val="8B0D18"/>
-                </a:solidFill>
-                <a:latin typeface="Microsoft YaHei"/>
-              </a:rPr>
-              <a:t>属针对性检索而非系统综述，商品机型文献缺口已登记</a:t>
-            </a:r>
-          </a:p>
-        </p:txBody>
-      </p:sp>
     </p:spTree>
   </p:cSld>
   <p:clrMapOvr>
@@ -12212,41 +11897,6 @@
           </a:p>
         </p:txBody>
       </p:sp>
-      <p:sp>
-        <p:nvSpPr>
-          <p:cNvPr id="19" name="AGENT_TAKEAWAY"/>
-          <p:cNvSpPr txBox="1"/>
-          <p:nvPr/>
-        </p:nvSpPr>
-        <p:spPr>
-          <a:xfrm>
-            <a:off x="868680" y="5989320"/>
-            <a:ext cx="10195560" cy="274320"/>
-          </a:xfrm>
-          <a:prstGeom prst="rect">
-            <a:avLst/>
-          </a:prstGeom>
-          <a:noFill/>
-        </p:spPr>
-        <p:txBody>
-          <a:bodyPr wrap="square" lIns="0" rIns="0" tIns="0" bIns="0" anchor="ctr">
-            <a:spAutoFit/>
-          </a:bodyPr>
-          <a:lstStyle/>
-          <a:p>
-            <a:pPr algn="l"/>
-            <a:r>
-              <a:rPr sz="1600" b="1" ea="Microsoft YaHei">
-                <a:solidFill>
-                  <a:srgbClr val="8B0D18"/>
-                </a:solidFill>
-                <a:latin typeface="Microsoft YaHei"/>
-              </a:rPr>
-              <a:t>对比前须先补铲幅，否则两把刀条件不对等</a:t>
-            </a:r>
-          </a:p>
-        </p:txBody>
-      </p:sp>
     </p:spTree>
   </p:cSld>
   <p:clrMapOvr>
@@ -13223,41 +12873,6 @@
           </a:p>
         </p:txBody>
       </p:sp>
-      <p:sp>
-        <p:nvSpPr>
-          <p:cNvPr id="27" name="AGENT_TAKEAWAY"/>
-          <p:cNvSpPr txBox="1"/>
-          <p:nvPr/>
-        </p:nvSpPr>
-        <p:spPr>
-          <a:xfrm>
-            <a:off x="868680" y="5989320"/>
-            <a:ext cx="10195560" cy="274320"/>
-          </a:xfrm>
-          <a:prstGeom prst="rect">
-            <a:avLst/>
-          </a:prstGeom>
-          <a:noFill/>
-        </p:spPr>
-        <p:txBody>
-          <a:bodyPr wrap="square" lIns="0" rIns="0" tIns="0" bIns="0" anchor="ctr">
-            <a:spAutoFit/>
-          </a:bodyPr>
-          <a:lstStyle/>
-          <a:p>
-            <a:pPr algn="l"/>
-            <a:r>
-              <a:rPr sz="1600" b="1" ea="Microsoft YaHei">
-                <a:solidFill>
-                  <a:srgbClr val="8B0D18"/>
-                </a:solidFill>
-                <a:latin typeface="Microsoft YaHei"/>
-              </a:rPr>
-              <a:t>每一段都要能被独立量测，否则误差无法归因</a:t>
-            </a:r>
-          </a:p>
-        </p:txBody>
-      </p:sp>
     </p:spTree>
   </p:cSld>
   <p:clrMapOvr>
@@ -13865,41 +13480,6 @@
           </a:p>
         </p:txBody>
       </p:sp>
-      <p:sp>
-        <p:nvSpPr>
-          <p:cNvPr id="17" name="AGENT_TAKEAWAY"/>
-          <p:cNvSpPr txBox="1"/>
-          <p:nvPr/>
-        </p:nvSpPr>
-        <p:spPr>
-          <a:xfrm>
-            <a:off x="868680" y="5989320"/>
-            <a:ext cx="10195560" cy="274320"/>
-          </a:xfrm>
-          <a:prstGeom prst="rect">
-            <a:avLst/>
-          </a:prstGeom>
-          <a:noFill/>
-        </p:spPr>
-        <p:txBody>
-          <a:bodyPr wrap="square" lIns="0" rIns="0" tIns="0" bIns="0" anchor="ctr">
-            <a:spAutoFit/>
-          </a:bodyPr>
-          <a:lstStyle/>
-          <a:p>
-            <a:pPr algn="l"/>
-            <a:r>
-              <a:rPr sz="1600" b="1" ea="Microsoft YaHei">
-                <a:solidFill>
-                  <a:srgbClr val="8B0D18"/>
-                </a:solidFill>
-                <a:latin typeface="Microsoft YaHei"/>
-              </a:rPr>
-              <a:t>主动对行这件事天然只发生在中间刀上</a:t>
-            </a:r>
-          </a:p>
-        </p:txBody>
-      </p:sp>
     </p:spTree>
   </p:cSld>
   <p:clrMapOvr>
@@ -14563,41 +14143,6 @@
               <a:t>1. 底盘保持沿行，只做粗纠
 2. 小惯量滑台做厘米级细对行
 3. 滑台 300 mm 行程，尚未接线</a:t>
-            </a:r>
-          </a:p>
-        </p:txBody>
-      </p:sp>
-      <p:sp>
-        <p:nvSpPr>
-          <p:cNvPr id="19" name="AGENT_TAKEAWAY"/>
-          <p:cNvSpPr txBox="1"/>
-          <p:nvPr/>
-        </p:nvSpPr>
-        <p:spPr>
-          <a:xfrm>
-            <a:off x="868680" y="5989320"/>
-            <a:ext cx="10195560" cy="274320"/>
-          </a:xfrm>
-          <a:prstGeom prst="rect">
-            <a:avLst/>
-          </a:prstGeom>
-          <a:noFill/>
-        </p:spPr>
-        <p:txBody>
-          <a:bodyPr wrap="square" lIns="0" rIns="0" tIns="0" bIns="0" anchor="ctr">
-            <a:spAutoFit/>
-          </a:bodyPr>
-          <a:lstStyle/>
-          <a:p>
-            <a:pPr algn="l"/>
-            <a:r>
-              <a:rPr sz="1600" b="1" ea="Microsoft YaHei">
-                <a:solidFill>
-                  <a:srgbClr val="8B0D18"/>
-                </a:solidFill>
-                <a:latin typeface="Microsoft YaHei"/>
-              </a:rPr>
-              <a:t>两级分工是后续所有试验设计的组织方式</a:t>
             </a:r>
           </a:p>
         </p:txBody>

--- a/docs/组会汇报_20260916/组会汇报_纯视觉芍药行间除草机器人_20260916.pptx
+++ b/docs/组会汇报_20260916/组会汇报_纯视觉芍药行间除草机器人_20260916.pptx
@@ -8963,43 +8963,7 @@
       </p:sp>
       <p:sp>
         <p:nvSpPr>
-          <p:cNvPr id="3" name="AGENT_CLOSING_META"/>
-          <p:cNvSpPr txBox="1"/>
-          <p:nvPr/>
-        </p:nvSpPr>
-        <p:spPr>
-          <a:xfrm>
-            <a:off x="1828800" y="3977639"/>
-            <a:ext cx="8503920" cy="502920"/>
-          </a:xfrm>
-          <a:prstGeom prst="rect">
-            <a:avLst/>
-          </a:prstGeom>
-          <a:noFill/>
-        </p:spPr>
-        <p:txBody>
-          <a:bodyPr wrap="square" lIns="0" rIns="0" tIns="0" bIns="0" anchor="ctr">
-            <a:spAutoFit/>
-          </a:bodyPr>
-          <a:lstStyle/>
-          <a:p>
-            <a:pPr algn="ctr"/>
-            <a:r>
-              <a:rPr sz="1300" b="0" ea="Microsoft YaHei">
-                <a:solidFill>
-                  <a:srgbClr val="696969"/>
-                </a:solidFill>
-                <a:latin typeface="Microsoft YaHei"/>
-              </a:rPr>
-              <a:t>讨论：① 进土深度走哪条路　② 鸭掌铲幅宽何时补测
-③ 春季田块需书面确认　｜　全部依据与台账在仓库可查</a:t>
-            </a:r>
-          </a:p>
-        </p:txBody>
-      </p:sp>
-      <p:sp>
-        <p:nvSpPr>
-          <p:cNvPr id="4" name="AGENT_CLOSING_BOTTOM_BAND"/>
+          <p:cNvPr id="3" name="AGENT_CLOSING_BOTTOM_BAND"/>
           <p:cNvSpPr/>
           <p:nvPr/>
         </p:nvSpPr>
